--- a/notes/2025.01.22.DASH16Notes.pptx
+++ b/notes/2025.01.22.DASH16Notes.pptx
@@ -5,7 +5,7 @@
     <p:sldMasterId id="2147483659" r:id="rId1"/>
   </p:sldMasterIdLst>
   <p:notesMasterIdLst>
-    <p:notesMasterId r:id="rId8"/>
+    <p:notesMasterId r:id="rId9"/>
   </p:notesMasterIdLst>
   <p:sldIdLst>
     <p:sldId id="256" r:id="rId2"/>
@@ -14,6 +14,7 @@
     <p:sldId id="272" r:id="rId5"/>
     <p:sldId id="271" r:id="rId6"/>
     <p:sldId id="273" r:id="rId7"/>
+    <p:sldId id="274" r:id="rId8"/>
   </p:sldIdLst>
   <p:sldSz cx="9144000" cy="5143500" type="screen16x9"/>
   <p:notesSz cx="6858000" cy="9144000"/>
@@ -8153,6 +8154,613 @@
 </p:sld>
 </file>
 
+<file path=ppt/slides/slide7.xml><?xml version="1.0" encoding="utf-8"?>
+<p:sld xmlns:a="http://schemas.openxmlformats.org/drawingml/2006/main" xmlns:r="http://schemas.openxmlformats.org/officeDocument/2006/relationships" xmlns:p="http://schemas.openxmlformats.org/presentationml/2006/main">
+  <p:cSld>
+    <p:spTree>
+      <p:nvGrpSpPr>
+        <p:cNvPr id="1" name=""/>
+        <p:cNvGrpSpPr/>
+        <p:nvPr/>
+      </p:nvGrpSpPr>
+      <p:grpSpPr>
+        <a:xfrm>
+          <a:off x="0" y="0"/>
+          <a:ext cx="0" cy="0"/>
+          <a:chOff x="0" y="0"/>
+          <a:chExt cx="0" cy="0"/>
+        </a:xfrm>
+      </p:grpSpPr>
+      <p:sp>
+        <p:nvSpPr>
+          <p:cNvPr id="2" name="Title 1">
+            <a:extLst>
+              <a:ext uri="{FF2B5EF4-FFF2-40B4-BE49-F238E27FC236}">
+                <a16:creationId xmlns:a16="http://schemas.microsoft.com/office/drawing/2014/main" id="{703A580F-AEA3-B492-0DE1-FD1AEC70D3B5}"/>
+              </a:ext>
+            </a:extLst>
+          </p:cNvPr>
+          <p:cNvSpPr>
+            <a:spLocks noGrp="1"/>
+          </p:cNvSpPr>
+          <p:nvPr>
+            <p:ph type="title"/>
+          </p:nvPr>
+        </p:nvSpPr>
+        <p:spPr>
+          <a:xfrm>
+            <a:off x="244323" y="108140"/>
+            <a:ext cx="8520600" cy="572700"/>
+          </a:xfrm>
+        </p:spPr>
+        <p:txBody>
+          <a:bodyPr>
+            <a:normAutofit fontScale="90000"/>
+          </a:bodyPr>
+          <a:lstStyle/>
+          <a:p>
+            <a:r>
+              <a:rPr lang="en-NL" dirty="0"/>
+              <a:t>DASH Discussion Notes</a:t>
+            </a:r>
+          </a:p>
+        </p:txBody>
+      </p:sp>
+      <p:sp>
+        <p:nvSpPr>
+          <p:cNvPr id="3" name="Text Placeholder 2">
+            <a:extLst>
+              <a:ext uri="{FF2B5EF4-FFF2-40B4-BE49-F238E27FC236}">
+                <a16:creationId xmlns:a16="http://schemas.microsoft.com/office/drawing/2014/main" id="{2F7AA684-F5CA-CF30-A33C-58B36FF9D9D6}"/>
+              </a:ext>
+            </a:extLst>
+          </p:cNvPr>
+          <p:cNvSpPr>
+            <a:spLocks noGrp="1"/>
+          </p:cNvSpPr>
+          <p:nvPr>
+            <p:ph type="body" idx="1"/>
+          </p:nvPr>
+        </p:nvSpPr>
+        <p:spPr>
+          <a:xfrm>
+            <a:off x="182880" y="680840"/>
+            <a:ext cx="8716797" cy="4058736"/>
+          </a:xfrm>
+        </p:spPr>
+        <p:txBody>
+          <a:bodyPr>
+            <a:normAutofit fontScale="40000" lnSpcReduction="20000"/>
+          </a:bodyPr>
+          <a:lstStyle/>
+          <a:p>
+            <a:pPr marL="114300" indent="0">
+              <a:buNone/>
+            </a:pPr>
+            <a:r>
+              <a:rPr lang="en-GB" dirty="0">
+                <a:effectLst/>
+                <a:latin typeface="Helvetica Neue" panose="02000503000000020004" pitchFamily="2" charset="0"/>
+              </a:rPr>
+              <a:t>“Plate”</a:t>
+            </a:r>
+          </a:p>
+          <a:p>
+            <a:pPr marL="114300" indent="0">
+              <a:buNone/>
+            </a:pPr>
+            <a:r>
+              <a:rPr lang="en-GB" dirty="0">
+                <a:effectLst/>
+                <a:latin typeface="Helvetica Neue" panose="02000503000000020004" pitchFamily="2" charset="0"/>
+              </a:rPr>
+              <a:t>which plate was it run on?</a:t>
+            </a:r>
+          </a:p>
+          <a:p>
+            <a:pPr marL="114300" indent="0">
+              <a:buNone/>
+            </a:pPr>
+            <a:r>
+              <a:rPr lang="en-GB" dirty="0">
+                <a:effectLst/>
+                <a:latin typeface="Helvetica Neue" panose="02000503000000020004" pitchFamily="2" charset="0"/>
+              </a:rPr>
+              <a:t>- because if there is contamination there can be info on which plate it was run on.</a:t>
+            </a:r>
+          </a:p>
+          <a:p>
+            <a:pPr>
+              <a:buFontTx/>
+              <a:buChar char="-"/>
+            </a:pPr>
+            <a:r>
+              <a:rPr lang="en-GB" dirty="0">
+                <a:effectLst/>
+                <a:latin typeface="Helvetica Neue" panose="02000503000000020004" pitchFamily="2" charset="0"/>
+              </a:rPr>
+              <a:t>could be multiple kits on one plate</a:t>
+            </a:r>
+          </a:p>
+          <a:p>
+            <a:pPr>
+              <a:buFontTx/>
+              <a:buChar char="-"/>
+            </a:pPr>
+            <a:r>
+              <a:rPr lang="en-GB" dirty="0">
+                <a:latin typeface="Helvetica Neue" panose="02000503000000020004" pitchFamily="2" charset="0"/>
+              </a:rPr>
+              <a:t>(Maybe this is as easy as putting a plate ID somewhere)</a:t>
+            </a:r>
+            <a:br>
+              <a:rPr lang="en-GB" dirty="0">
+                <a:effectLst/>
+                <a:latin typeface="Helvetica Neue" panose="02000503000000020004" pitchFamily="2" charset="0"/>
+              </a:rPr>
+            </a:br>
+            <a:endParaRPr lang="en-GB" dirty="0">
+              <a:effectLst/>
+              <a:latin typeface="Helvetica Neue" panose="02000503000000020004" pitchFamily="2" charset="0"/>
+            </a:endParaRPr>
+          </a:p>
+          <a:p>
+            <a:pPr marL="114300" indent="0">
+              <a:buNone/>
+            </a:pPr>
+            <a:r>
+              <a:rPr lang="en-GB" dirty="0" err="1">
+                <a:effectLst/>
+                <a:latin typeface="Helvetica Neue" panose="02000503000000020004" pitchFamily="2" charset="0"/>
+              </a:rPr>
+              <a:t>plstring</a:t>
+            </a:r>
+            <a:endParaRPr lang="en-GB" dirty="0">
+              <a:effectLst/>
+              <a:latin typeface="Helvetica Neue" panose="02000503000000020004" pitchFamily="2" charset="0"/>
+            </a:endParaRPr>
+          </a:p>
+          <a:p>
+            <a:pPr marL="114300" indent="0">
+              <a:buNone/>
+            </a:pPr>
+            <a:r>
+              <a:rPr lang="en-GB" dirty="0">
+                <a:effectLst/>
+                <a:latin typeface="Helvetica Neue" panose="02000503000000020004" pitchFamily="2" charset="0"/>
+              </a:rPr>
+              <a:t>Suggest: alpha first then beta second</a:t>
+            </a:r>
+          </a:p>
+          <a:p>
+            <a:pPr marL="114300" indent="0">
+              <a:buNone/>
+            </a:pPr>
+            <a:r>
+              <a:rPr lang="en-GB" dirty="0">
+                <a:effectLst/>
+                <a:latin typeface="Helvetica Neue" panose="02000503000000020004" pitchFamily="2" charset="0"/>
+              </a:rPr>
+              <a:t>- Maybe - force a single nomenclature system / namespace in a single </a:t>
+            </a:r>
+            <a:r>
+              <a:rPr lang="en-GB" dirty="0" err="1">
+                <a:effectLst/>
+                <a:latin typeface="Helvetica Neue" panose="02000503000000020004" pitchFamily="2" charset="0"/>
+              </a:rPr>
+              <a:t>plstring</a:t>
+            </a:r>
+            <a:br>
+              <a:rPr lang="en-GB" dirty="0">
+                <a:effectLst/>
+                <a:latin typeface="Helvetica Neue" panose="02000503000000020004" pitchFamily="2" charset="0"/>
+              </a:rPr>
+            </a:br>
+            <a:endParaRPr lang="en-GB" dirty="0">
+              <a:effectLst/>
+              <a:latin typeface="Helvetica Neue" panose="02000503000000020004" pitchFamily="2" charset="0"/>
+            </a:endParaRPr>
+          </a:p>
+          <a:p>
+            <a:pPr marL="114300" indent="0">
+              <a:buNone/>
+            </a:pPr>
+            <a:r>
+              <a:rPr lang="en-GB" dirty="0">
+                <a:effectLst/>
+                <a:latin typeface="Helvetica Neue" panose="02000503000000020004" pitchFamily="2" charset="0"/>
+              </a:rPr>
+              <a:t>Which namespace - which nomenclature system can be used? This is a good thing to add.</a:t>
+            </a:r>
+          </a:p>
+          <a:p>
+            <a:pPr marL="114300" indent="0">
+              <a:buNone/>
+            </a:pPr>
+            <a:br>
+              <a:rPr lang="en-GB" dirty="0">
+                <a:effectLst/>
+                <a:latin typeface="Helvetica Neue" panose="02000503000000020004" pitchFamily="2" charset="0"/>
+              </a:rPr>
+            </a:br>
+            <a:endParaRPr lang="en-GB" dirty="0">
+              <a:effectLst/>
+              <a:latin typeface="Helvetica Neue" panose="02000503000000020004" pitchFamily="2" charset="0"/>
+            </a:endParaRPr>
+          </a:p>
+          <a:p>
+            <a:pPr marL="114300" indent="0">
+              <a:buNone/>
+            </a:pPr>
+            <a:r>
+              <a:rPr lang="en-GB" dirty="0">
+                <a:effectLst/>
+                <a:latin typeface="Helvetica Neue" panose="02000503000000020004" pitchFamily="2" charset="0"/>
+              </a:rPr>
+              <a:t>Ben &amp; Martin: </a:t>
+            </a:r>
+            <a:r>
+              <a:rPr lang="en-GB" dirty="0" err="1">
+                <a:effectLst/>
+                <a:latin typeface="Helvetica Neue" panose="02000503000000020004" pitchFamily="2" charset="0"/>
+              </a:rPr>
+              <a:t>followup</a:t>
+            </a:r>
+            <a:r>
+              <a:rPr lang="en-GB" dirty="0">
+                <a:effectLst/>
+                <a:latin typeface="Helvetica Neue" panose="02000503000000020004" pitchFamily="2" charset="0"/>
+              </a:rPr>
+              <a:t> with David Wroe</a:t>
+            </a:r>
+          </a:p>
+          <a:p>
+            <a:pPr marL="114300" indent="0">
+              <a:buNone/>
+            </a:pPr>
+            <a:endParaRPr lang="en-GB" dirty="0">
+              <a:effectLst/>
+              <a:latin typeface="Helvetica Neue" panose="02000503000000020004" pitchFamily="2" charset="0"/>
+            </a:endParaRPr>
+          </a:p>
+          <a:p>
+            <a:pPr marL="114300" indent="0">
+              <a:buNone/>
+            </a:pPr>
+            <a:r>
+              <a:rPr lang="en-GB" dirty="0">
+                <a:effectLst/>
+                <a:latin typeface="Helvetica Neue" panose="02000503000000020004" pitchFamily="2" charset="0"/>
+              </a:rPr>
+              <a:t>Use cases - Start with research and upload </a:t>
+            </a:r>
+          </a:p>
+          <a:p>
+            <a:pPr marL="114300" indent="0">
+              <a:buNone/>
+            </a:pPr>
+            <a:r>
+              <a:rPr lang="en-GB" dirty="0">
+                <a:effectLst/>
+                <a:latin typeface="Helvetica Neue" panose="02000503000000020004" pitchFamily="2" charset="0"/>
+              </a:rPr>
+              <a:t>- Can we include </a:t>
+            </a:r>
+            <a:r>
+              <a:rPr lang="en-GB" dirty="0" err="1">
+                <a:effectLst/>
+                <a:latin typeface="Helvetica Neue" panose="02000503000000020004" pitchFamily="2" charset="0"/>
+              </a:rPr>
+              <a:t>cPRA</a:t>
+            </a:r>
+            <a:r>
+              <a:rPr lang="en-GB" dirty="0">
+                <a:effectLst/>
+                <a:latin typeface="Helvetica Neue" panose="02000503000000020004" pitchFamily="2" charset="0"/>
+              </a:rPr>
+              <a:t>? Or enough info to create it?</a:t>
+            </a:r>
+          </a:p>
+          <a:p>
+            <a:pPr marL="114300" indent="0">
+              <a:buNone/>
+            </a:pPr>
+            <a:r>
+              <a:rPr lang="en-GB" dirty="0">
+                <a:effectLst/>
+                <a:latin typeface="Helvetica Neue" panose="02000503000000020004" pitchFamily="2" charset="0"/>
+              </a:rPr>
+              <a:t>- Some batch thing from </a:t>
+            </a:r>
+            <a:r>
+              <a:rPr lang="en-GB" dirty="0" err="1">
+                <a:effectLst/>
+                <a:latin typeface="Helvetica Neue" panose="02000503000000020004" pitchFamily="2" charset="0"/>
+              </a:rPr>
+              <a:t>CareDx</a:t>
+            </a:r>
+            <a:r>
+              <a:rPr lang="en-GB" dirty="0">
+                <a:effectLst/>
+                <a:latin typeface="Helvetica Neue" panose="02000503000000020004" pitchFamily="2" charset="0"/>
+              </a:rPr>
+              <a:t> into </a:t>
+            </a:r>
+            <a:r>
+              <a:rPr lang="en-GB" dirty="0" err="1">
+                <a:effectLst/>
+                <a:latin typeface="Helvetica Neue" panose="02000503000000020004" pitchFamily="2" charset="0"/>
+              </a:rPr>
+              <a:t>matilda</a:t>
+            </a:r>
+            <a:r>
+              <a:rPr lang="en-GB" dirty="0">
+                <a:effectLst/>
+                <a:latin typeface="Helvetica Neue" panose="02000503000000020004" pitchFamily="2" charset="0"/>
+              </a:rPr>
+              <a:t>, we could use this as a tool for that.</a:t>
+            </a:r>
+          </a:p>
+          <a:p>
+            <a:pPr marL="114300" indent="0">
+              <a:buNone/>
+            </a:pPr>
+            <a:br>
+              <a:rPr lang="en-GB" dirty="0">
+                <a:effectLst/>
+                <a:latin typeface="Helvetica Neue" panose="02000503000000020004" pitchFamily="2" charset="0"/>
+              </a:rPr>
+            </a:br>
+            <a:endParaRPr lang="en-GB" dirty="0">
+              <a:effectLst/>
+              <a:latin typeface="Helvetica Neue" panose="02000503000000020004" pitchFamily="2" charset="0"/>
+            </a:endParaRPr>
+          </a:p>
+          <a:p>
+            <a:pPr marL="114300" indent="0">
+              <a:buNone/>
+            </a:pPr>
+            <a:r>
+              <a:rPr lang="en-GB" dirty="0">
+                <a:latin typeface="Helvetica Neue" panose="02000503000000020004" pitchFamily="2" charset="0"/>
+              </a:rPr>
+              <a:t>Loren:</a:t>
+            </a:r>
+            <a:endParaRPr lang="en-GB" dirty="0">
+              <a:effectLst/>
+              <a:latin typeface="Helvetica Neue" panose="02000503000000020004" pitchFamily="2" charset="0"/>
+            </a:endParaRPr>
+          </a:p>
+          <a:p>
+            <a:pPr marL="114300" indent="0">
+              <a:buNone/>
+            </a:pPr>
+            <a:r>
+              <a:rPr lang="en-GB" dirty="0">
+                <a:effectLst/>
+                <a:latin typeface="Helvetica Neue" panose="02000503000000020004" pitchFamily="2" charset="0"/>
+              </a:rPr>
+              <a:t>&lt;requisition-reason&gt; instead of &lt;document-context&gt;</a:t>
+            </a:r>
+          </a:p>
+          <a:p>
+            <a:pPr marL="114300" indent="0">
+              <a:buNone/>
+            </a:pPr>
+            <a:r>
+              <a:rPr lang="en-GB" dirty="0">
+                <a:effectLst/>
+                <a:latin typeface="Helvetica Neue" panose="02000503000000020004" pitchFamily="2" charset="0"/>
+              </a:rPr>
+              <a:t>- What does FHIR do?</a:t>
+            </a:r>
+          </a:p>
+          <a:p>
+            <a:pPr marL="114300" indent="0">
+              <a:buNone/>
+            </a:pPr>
+            <a:br>
+              <a:rPr lang="en-GB" dirty="0">
+                <a:effectLst/>
+                <a:latin typeface="Helvetica Neue" panose="02000503000000020004" pitchFamily="2" charset="0"/>
+              </a:rPr>
+            </a:br>
+            <a:r>
+              <a:rPr lang="en-GB" dirty="0">
+                <a:effectLst/>
+                <a:latin typeface="Helvetica Neue" panose="02000503000000020004" pitchFamily="2" charset="0"/>
+              </a:rPr>
+              <a:t>Update HAML Converter? Yes but that will affect reporting on the 18</a:t>
+            </a:r>
+            <a:r>
+              <a:rPr lang="en-GB" baseline="30000" dirty="0">
+                <a:effectLst/>
+                <a:latin typeface="Helvetica Neue" panose="02000503000000020004" pitchFamily="2" charset="0"/>
+              </a:rPr>
+              <a:t>th</a:t>
+            </a:r>
+            <a:r>
+              <a:rPr lang="en-GB" dirty="0">
+                <a:effectLst/>
+                <a:latin typeface="Helvetica Neue" panose="02000503000000020004" pitchFamily="2" charset="0"/>
+              </a:rPr>
+              <a:t> Database. Ben can help accommodate that.</a:t>
+            </a:r>
+          </a:p>
+          <a:p>
+            <a:pPr marL="114300" indent="0">
+              <a:buNone/>
+            </a:pPr>
+            <a:r>
+              <a:rPr lang="en-GB" dirty="0">
+                <a:latin typeface="Helvetica Neue" panose="02000503000000020004" pitchFamily="2" charset="0"/>
+              </a:rPr>
+              <a:t>        Maybe William and </a:t>
+            </a:r>
+            <a:r>
+              <a:rPr lang="en-GB">
+                <a:latin typeface="Helvetica Neue" panose="02000503000000020004" pitchFamily="2" charset="0"/>
+              </a:rPr>
+              <a:t>Livia  and Ben are </a:t>
+            </a:r>
+            <a:r>
+              <a:rPr lang="en-GB" dirty="0">
+                <a:latin typeface="Helvetica Neue" panose="02000503000000020004" pitchFamily="2" charset="0"/>
+              </a:rPr>
+              <a:t>interested in the HAML converter tool</a:t>
+            </a:r>
+          </a:p>
+          <a:p>
+            <a:pPr marL="114300" indent="0">
+              <a:buNone/>
+            </a:pPr>
+            <a:endParaRPr lang="en-GB" dirty="0">
+              <a:effectLst/>
+              <a:latin typeface="Helvetica Neue" panose="02000503000000020004" pitchFamily="2" charset="0"/>
+            </a:endParaRPr>
+          </a:p>
+          <a:p>
+            <a:pPr marL="114300" indent="0">
+              <a:buNone/>
+            </a:pPr>
+            <a:r>
+              <a:rPr lang="en-GB" dirty="0">
+                <a:effectLst/>
+                <a:latin typeface="Helvetica Neue" panose="02000503000000020004" pitchFamily="2" charset="0"/>
+              </a:rPr>
+              <a:t>William:</a:t>
+            </a:r>
+          </a:p>
+          <a:p>
+            <a:pPr marL="114300" indent="0">
+              <a:buNone/>
+            </a:pPr>
+            <a:r>
+              <a:rPr lang="en-GB" dirty="0">
+                <a:effectLst/>
+                <a:latin typeface="Helvetica Neue" panose="02000503000000020004" pitchFamily="2" charset="0"/>
+              </a:rPr>
+              <a:t>I have a comment regarding version 0.4.3: I think </a:t>
+            </a:r>
+            <a:r>
+              <a:rPr lang="en-GB" dirty="0" err="1">
+                <a:effectLst/>
+                <a:latin typeface="Helvetica Neue" panose="02000503000000020004" pitchFamily="2" charset="0"/>
+              </a:rPr>
+              <a:t>plstrings</a:t>
+            </a:r>
+            <a:r>
+              <a:rPr lang="en-GB" dirty="0">
+                <a:effectLst/>
+                <a:latin typeface="Helvetica Neue" panose="02000503000000020004" pitchFamily="2" charset="0"/>
+              </a:rPr>
+              <a:t> should be capped at 1 per specificity (positive, </a:t>
+            </a:r>
+            <a:r>
+              <a:rPr lang="en-GB" dirty="0" err="1">
+                <a:effectLst/>
+                <a:latin typeface="Helvetica Neue" panose="02000503000000020004" pitchFamily="2" charset="0"/>
+              </a:rPr>
+              <a:t>questionnable</a:t>
+            </a:r>
+            <a:r>
+              <a:rPr lang="en-GB" dirty="0">
+                <a:effectLst/>
+                <a:latin typeface="Helvetica Neue" panose="02000503000000020004" pitchFamily="2" charset="0"/>
+              </a:rPr>
+              <a:t>, and negative). There can be more than one interpretation, but only one conclusion per interpretation.</a:t>
+            </a:r>
+          </a:p>
+          <a:p>
+            <a:pPr marL="114300" indent="0">
+              <a:buNone/>
+            </a:pPr>
+            <a:endParaRPr lang="en-GB" dirty="0">
+              <a:effectLst/>
+              <a:latin typeface="Helvetica Neue" panose="02000503000000020004" pitchFamily="2" charset="0"/>
+            </a:endParaRPr>
+          </a:p>
+          <a:p>
+            <a:pPr marL="114300" indent="0">
+              <a:buNone/>
+            </a:pPr>
+            <a:br>
+              <a:rPr lang="en-GB" dirty="0">
+                <a:effectLst/>
+                <a:latin typeface="Helvetica Neue" panose="02000503000000020004" pitchFamily="2" charset="0"/>
+              </a:rPr>
+            </a:br>
+            <a:r>
+              <a:rPr lang="en-GB" dirty="0" err="1">
+                <a:effectLst/>
+                <a:latin typeface="Helvetica Neue" panose="02000503000000020004" pitchFamily="2" charset="0"/>
+              </a:rPr>
+              <a:t>ben.matern</a:t>
+            </a:r>
+            <a:endParaRPr lang="en-GB" dirty="0">
+              <a:effectLst/>
+              <a:latin typeface="Helvetica Neue" panose="02000503000000020004" pitchFamily="2" charset="0"/>
+            </a:endParaRPr>
+          </a:p>
+          <a:p>
+            <a:pPr marL="114300" indent="0">
+              <a:buNone/>
+            </a:pPr>
+            <a:r>
+              <a:rPr lang="en-GB" dirty="0">
+                <a:effectLst/>
+                <a:latin typeface="Helvetica Neue" panose="02000503000000020004" pitchFamily="2" charset="0"/>
+              </a:rPr>
+              <a:t>I think that can work; as long as it's acceptable to have multiple nomenclatures in a single </a:t>
+            </a:r>
+            <a:r>
+              <a:rPr lang="en-GB" dirty="0" err="1">
+                <a:effectLst/>
+                <a:latin typeface="Helvetica Neue" panose="02000503000000020004" pitchFamily="2" charset="0"/>
+              </a:rPr>
+              <a:t>PLString</a:t>
+            </a:r>
+            <a:r>
+              <a:rPr lang="en-GB" dirty="0">
+                <a:effectLst/>
+                <a:latin typeface="Helvetica Neue" panose="02000503000000020004" pitchFamily="2" charset="0"/>
+              </a:rPr>
+              <a:t>,</a:t>
+            </a:r>
+          </a:p>
+          <a:p>
+            <a:pPr marL="114300" indent="0">
+              <a:buNone/>
+            </a:pPr>
+            <a:r>
+              <a:rPr lang="en-GB" dirty="0">
+                <a:effectLst/>
+                <a:latin typeface="Helvetica Neue" panose="02000503000000020004" pitchFamily="2" charset="0"/>
+              </a:rPr>
+              <a:t>Maybe someone wants to specify specific alleles as "positive", and might also specify an antigen at the same time</a:t>
+            </a:r>
+          </a:p>
+          <a:p>
+            <a:pPr marL="114300" indent="0">
+              <a:buNone/>
+            </a:pPr>
+            <a:endParaRPr lang="en-NL" dirty="0"/>
+          </a:p>
+        </p:txBody>
+      </p:sp>
+    </p:spTree>
+    <p:extLst>
+      <p:ext uri="{BB962C8B-B14F-4D97-AF65-F5344CB8AC3E}">
+        <p14:creationId xmlns:p14="http://schemas.microsoft.com/office/powerpoint/2010/main" val="1419665617"/>
+      </p:ext>
+    </p:extLst>
+  </p:cSld>
+  <p:clrMapOvr>
+    <a:masterClrMapping/>
+  </p:clrMapOvr>
+</p:sld>
+</file>
+
 <file path=ppt/theme/theme1.xml><?xml version="1.0" encoding="utf-8"?>
 <a:theme xmlns:a="http://schemas.openxmlformats.org/drawingml/2006/main" name="Simple Light">
   <a:themeElements>

--- a/notes/2025.01.22.DASH16Notes.pptx
+++ b/notes/2025.01.22.DASH16Notes.pptx
@@ -8200,8 +8200,12 @@
           <a:lstStyle/>
           <a:p>
             <a:r>
+              <a:rPr lang="en-NL"/>
+              <a:t>DASH 16 Discussion </a:t>
+            </a:r>
+            <a:r>
               <a:rPr lang="en-NL" dirty="0"/>
-              <a:t>DASH Discussion Notes</a:t>
+              <a:t>Notes</a:t>
             </a:r>
           </a:p>
         </p:txBody>
@@ -8230,7 +8234,7 @@
         </p:spPr>
         <p:txBody>
           <a:bodyPr>
-            <a:normAutofit fontScale="40000" lnSpcReduction="20000"/>
+            <a:normAutofit fontScale="32500" lnSpcReduction="20000"/>
           </a:bodyPr>
           <a:lstStyle/>
           <a:p>
@@ -8595,19 +8599,42 @@
               <a:rPr lang="en-GB" dirty="0">
                 <a:latin typeface="Helvetica Neue" panose="02000503000000020004" pitchFamily="2" charset="0"/>
               </a:rPr>
-              <a:t>        Maybe William and </a:t>
-            </a:r>
-            <a:r>
-              <a:rPr lang="en-GB">
-                <a:latin typeface="Helvetica Neue" panose="02000503000000020004" pitchFamily="2" charset="0"/>
-              </a:rPr>
-              <a:t>Livia  and Ben are </a:t>
-            </a:r>
+              <a:t>        Maybe William and Livia  and Ben are interested in the HAML converter tool</a:t>
+            </a:r>
+          </a:p>
+          <a:p>
+            <a:pPr marL="114300" indent="0">
+              <a:buNone/>
+            </a:pPr>
             <a:r>
               <a:rPr lang="en-GB" dirty="0">
                 <a:latin typeface="Helvetica Neue" panose="02000503000000020004" pitchFamily="2" charset="0"/>
               </a:rPr>
-              <a:t>interested in the HAML converter tool</a:t>
+              <a:t>        William and Livia demonstrated a good first pass of the modified converter. When it seems to consistently create schema-compliant </a:t>
+            </a:r>
+            <a:r>
+              <a:rPr lang="en-GB" dirty="0" err="1">
+                <a:latin typeface="Helvetica Neue" panose="02000503000000020004" pitchFamily="2" charset="0"/>
+              </a:rPr>
+              <a:t>hamls</a:t>
+            </a:r>
+            <a:r>
+              <a:rPr lang="en-GB" dirty="0">
+                <a:latin typeface="Helvetica Neue" panose="02000503000000020004" pitchFamily="2" charset="0"/>
+              </a:rPr>
+              <a:t> for both vendors, we can try updating the lambda functions for the 18</a:t>
+            </a:r>
+            <a:r>
+              <a:rPr lang="en-GB" baseline="30000" dirty="0">
+                <a:latin typeface="Helvetica Neue" panose="02000503000000020004" pitchFamily="2" charset="0"/>
+              </a:rPr>
+              <a:t>th</a:t>
+            </a:r>
+            <a:r>
+              <a:rPr lang="en-GB" dirty="0">
+                <a:latin typeface="Helvetica Neue" panose="02000503000000020004" pitchFamily="2" charset="0"/>
+              </a:rPr>
+              <a:t> database.</a:t>
             </a:r>
           </a:p>
           <a:p>
@@ -8739,6 +8766,51 @@
               </a:rPr>
               <a:t>Maybe someone wants to specify specific alleles as "positive", and might also specify an antigen at the same time</a:t>
             </a:r>
+            <a:br>
+              <a:rPr lang="en-GB" dirty="0">
+                <a:effectLst/>
+                <a:latin typeface="Helvetica Neue" panose="02000503000000020004" pitchFamily="2" charset="0"/>
+              </a:rPr>
+            </a:br>
+            <a:br>
+              <a:rPr lang="en-GB" dirty="0">
+                <a:effectLst/>
+                <a:latin typeface="Helvetica Neue" panose="02000503000000020004" pitchFamily="2" charset="0"/>
+              </a:rPr>
+            </a:br>
+            <a:r>
+              <a:rPr lang="en-GB" dirty="0">
+                <a:effectLst/>
+                <a:latin typeface="Helvetica Neue" panose="02000503000000020004" pitchFamily="2" charset="0"/>
+              </a:rPr>
+              <a:t>Question: </a:t>
+            </a:r>
+          </a:p>
+          <a:p>
+            <a:pPr marL="114300" indent="0">
+              <a:buNone/>
+            </a:pPr>
+            <a:r>
+              <a:rPr lang="en-GB" dirty="0">
+                <a:latin typeface="Helvetica Neue" panose="02000503000000020004" pitchFamily="2" charset="0"/>
+              </a:rPr>
+              <a:t>         The number system 1,2,4,8, positive or negative or weak, </a:t>
+            </a:r>
+          </a:p>
+          <a:p>
+            <a:pPr marL="114300" indent="0">
+              <a:buNone/>
+            </a:pPr>
+            <a:r>
+              <a:rPr lang="en-GB" dirty="0">
+                <a:latin typeface="Helvetica Neue" panose="02000503000000020004" pitchFamily="2" charset="0"/>
+              </a:rPr>
+              <a:t>       Keep both fields and both are optional	</a:t>
+            </a:r>
+            <a:endParaRPr lang="en-GB" dirty="0">
+              <a:effectLst/>
+              <a:latin typeface="Helvetica Neue" panose="02000503000000020004" pitchFamily="2" charset="0"/>
+            </a:endParaRPr>
           </a:p>
           <a:p>
             <a:pPr marL="114300" indent="0">

--- a/notes/2025.01.22.DASH16Notes.pptx
+++ b/notes/2025.01.22.DASH16Notes.pptx
@@ -8200,12 +8200,8 @@
           <a:lstStyle/>
           <a:p>
             <a:r>
-              <a:rPr lang="en-NL"/>
-              <a:t>DASH 16 Discussion </a:t>
-            </a:r>
-            <a:r>
               <a:rPr lang="en-NL" dirty="0"/>
-              <a:t>Notes</a:t>
+              <a:t>DASH 16 Discussion Notes</a:t>
             </a:r>
           </a:p>
         </p:txBody>
@@ -8228,13 +8224,13 @@
         </p:nvSpPr>
         <p:spPr>
           <a:xfrm>
-            <a:off x="182880" y="680840"/>
-            <a:ext cx="8716797" cy="4058736"/>
+            <a:off x="115252" y="604639"/>
+            <a:ext cx="8913495" cy="4395985"/>
           </a:xfrm>
         </p:spPr>
         <p:txBody>
           <a:bodyPr>
-            <a:normAutofit fontScale="32500" lnSpcReduction="20000"/>
+            <a:noAutofit/>
           </a:bodyPr>
           <a:lstStyle/>
           <a:p>
@@ -8242,7 +8238,7 @@
               <a:buNone/>
             </a:pPr>
             <a:r>
-              <a:rPr lang="en-GB" dirty="0">
+              <a:rPr lang="en-GB" sz="600" dirty="0">
                 <a:effectLst/>
                 <a:latin typeface="Helvetica Neue" panose="02000503000000020004" pitchFamily="2" charset="0"/>
               </a:rPr>
@@ -8254,7 +8250,7 @@
               <a:buNone/>
             </a:pPr>
             <a:r>
-              <a:rPr lang="en-GB" dirty="0">
+              <a:rPr lang="en-GB" sz="600" dirty="0">
                 <a:effectLst/>
                 <a:latin typeface="Helvetica Neue" panose="02000503000000020004" pitchFamily="2" charset="0"/>
               </a:rPr>
@@ -8266,7 +8262,7 @@
               <a:buNone/>
             </a:pPr>
             <a:r>
-              <a:rPr lang="en-GB" dirty="0">
+              <a:rPr lang="en-GB" sz="600" dirty="0">
                 <a:effectLst/>
                 <a:latin typeface="Helvetica Neue" panose="02000503000000020004" pitchFamily="2" charset="0"/>
               </a:rPr>
@@ -8279,7 +8275,7 @@
               <a:buChar char="-"/>
             </a:pPr>
             <a:r>
-              <a:rPr lang="en-GB" dirty="0">
+              <a:rPr lang="en-GB" sz="600" dirty="0">
                 <a:effectLst/>
                 <a:latin typeface="Helvetica Neue" panose="02000503000000020004" pitchFamily="2" charset="0"/>
               </a:rPr>
@@ -8292,18 +8288,18 @@
               <a:buChar char="-"/>
             </a:pPr>
             <a:r>
-              <a:rPr lang="en-GB" dirty="0">
+              <a:rPr lang="en-GB" sz="600" dirty="0">
                 <a:latin typeface="Helvetica Neue" panose="02000503000000020004" pitchFamily="2" charset="0"/>
               </a:rPr>
               <a:t>(Maybe this is as easy as putting a plate ID somewhere)</a:t>
             </a:r>
             <a:br>
-              <a:rPr lang="en-GB" dirty="0">
+              <a:rPr lang="en-GB" sz="600" dirty="0">
                 <a:effectLst/>
                 <a:latin typeface="Helvetica Neue" panose="02000503000000020004" pitchFamily="2" charset="0"/>
               </a:rPr>
             </a:br>
-            <a:endParaRPr lang="en-GB" dirty="0">
+            <a:endParaRPr lang="en-GB" sz="600" dirty="0">
               <a:effectLst/>
               <a:latin typeface="Helvetica Neue" panose="02000503000000020004" pitchFamily="2" charset="0"/>
             </a:endParaRPr>
@@ -8313,13 +8309,13 @@
               <a:buNone/>
             </a:pPr>
             <a:r>
-              <a:rPr lang="en-GB" dirty="0" err="1">
+              <a:rPr lang="en-GB" sz="600" dirty="0" err="1">
                 <a:effectLst/>
                 <a:latin typeface="Helvetica Neue" panose="02000503000000020004" pitchFamily="2" charset="0"/>
               </a:rPr>
               <a:t>plstring</a:t>
             </a:r>
-            <a:endParaRPr lang="en-GB" dirty="0">
+            <a:endParaRPr lang="en-GB" sz="600" dirty="0">
               <a:effectLst/>
               <a:latin typeface="Helvetica Neue" panose="02000503000000020004" pitchFamily="2" charset="0"/>
             </a:endParaRPr>
@@ -8329,7 +8325,7 @@
               <a:buNone/>
             </a:pPr>
             <a:r>
-              <a:rPr lang="en-GB" dirty="0">
+              <a:rPr lang="en-GB" sz="600" dirty="0">
                 <a:effectLst/>
                 <a:latin typeface="Helvetica Neue" panose="02000503000000020004" pitchFamily="2" charset="0"/>
               </a:rPr>
@@ -8341,26 +8337,26 @@
               <a:buNone/>
             </a:pPr>
             <a:r>
-              <a:rPr lang="en-GB" dirty="0">
+              <a:rPr lang="en-GB" sz="600" dirty="0">
                 <a:effectLst/>
                 <a:latin typeface="Helvetica Neue" panose="02000503000000020004" pitchFamily="2" charset="0"/>
               </a:rPr>
               <a:t>- Maybe - force a single nomenclature system / namespace in a single </a:t>
             </a:r>
             <a:r>
-              <a:rPr lang="en-GB" dirty="0" err="1">
+              <a:rPr lang="en-GB" sz="600" dirty="0" err="1">
                 <a:effectLst/>
                 <a:latin typeface="Helvetica Neue" panose="02000503000000020004" pitchFamily="2" charset="0"/>
               </a:rPr>
               <a:t>plstring</a:t>
             </a:r>
             <a:br>
-              <a:rPr lang="en-GB" dirty="0">
+              <a:rPr lang="en-GB" sz="600" dirty="0">
                 <a:effectLst/>
                 <a:latin typeface="Helvetica Neue" panose="02000503000000020004" pitchFamily="2" charset="0"/>
               </a:rPr>
             </a:br>
-            <a:endParaRPr lang="en-GB" dirty="0">
+            <a:endParaRPr lang="en-GB" sz="600" dirty="0">
               <a:effectLst/>
               <a:latin typeface="Helvetica Neue" panose="02000503000000020004" pitchFamily="2" charset="0"/>
             </a:endParaRPr>
@@ -8370,24 +8366,18 @@
               <a:buNone/>
             </a:pPr>
             <a:r>
-              <a:rPr lang="en-GB" dirty="0">
+              <a:rPr lang="en-GB" sz="600" dirty="0">
                 <a:effectLst/>
                 <a:latin typeface="Helvetica Neue" panose="02000503000000020004" pitchFamily="2" charset="0"/>
               </a:rPr>
-              <a:t>Which namespace - which nomenclature system can be used? This is a good thing to add.</a:t>
+              <a:t>Which namespace - which nomenclature system can be used? This is a good thing to add. Ben: Suggest a field for this</a:t>
             </a:r>
           </a:p>
           <a:p>
             <a:pPr marL="114300" indent="0">
               <a:buNone/>
             </a:pPr>
-            <a:br>
-              <a:rPr lang="en-GB" dirty="0">
-                <a:effectLst/>
-                <a:latin typeface="Helvetica Neue" panose="02000503000000020004" pitchFamily="2" charset="0"/>
-              </a:rPr>
-            </a:br>
-            <a:endParaRPr lang="en-GB" dirty="0">
+            <a:endParaRPr lang="en-GB" sz="600" dirty="0">
               <a:effectLst/>
               <a:latin typeface="Helvetica Neue" panose="02000503000000020004" pitchFamily="2" charset="0"/>
             </a:endParaRPr>
@@ -8397,21 +8387,21 @@
               <a:buNone/>
             </a:pPr>
             <a:r>
-              <a:rPr lang="en-GB" dirty="0">
+              <a:rPr lang="en-GB" sz="600" dirty="0">
                 <a:effectLst/>
                 <a:latin typeface="Helvetica Neue" panose="02000503000000020004" pitchFamily="2" charset="0"/>
               </a:rPr>
               <a:t>Ben &amp; Martin: </a:t>
             </a:r>
             <a:r>
-              <a:rPr lang="en-GB" dirty="0" err="1">
+              <a:rPr lang="en-GB" sz="600" dirty="0" err="1">
                 <a:effectLst/>
                 <a:latin typeface="Helvetica Neue" panose="02000503000000020004" pitchFamily="2" charset="0"/>
               </a:rPr>
               <a:t>followup</a:t>
             </a:r>
             <a:r>
-              <a:rPr lang="en-GB" dirty="0">
+              <a:rPr lang="en-GB" sz="600" dirty="0">
                 <a:effectLst/>
                 <a:latin typeface="Helvetica Neue" panose="02000503000000020004" pitchFamily="2" charset="0"/>
               </a:rPr>
@@ -8422,7 +8412,7 @@
             <a:pPr marL="114300" indent="0">
               <a:buNone/>
             </a:pPr>
-            <a:endParaRPr lang="en-GB" dirty="0">
+            <a:endParaRPr lang="en-GB" sz="600" dirty="0">
               <a:effectLst/>
               <a:latin typeface="Helvetica Neue" panose="02000503000000020004" pitchFamily="2" charset="0"/>
             </a:endParaRPr>
@@ -8432,7 +8422,7 @@
               <a:buNone/>
             </a:pPr>
             <a:r>
-              <a:rPr lang="en-GB" dirty="0">
+              <a:rPr lang="en-GB" sz="600" dirty="0">
                 <a:effectLst/>
                 <a:latin typeface="Helvetica Neue" panose="02000503000000020004" pitchFamily="2" charset="0"/>
               </a:rPr>
@@ -8444,21 +8434,21 @@
               <a:buNone/>
             </a:pPr>
             <a:r>
-              <a:rPr lang="en-GB" dirty="0">
+              <a:rPr lang="en-GB" sz="600" dirty="0">
                 <a:effectLst/>
                 <a:latin typeface="Helvetica Neue" panose="02000503000000020004" pitchFamily="2" charset="0"/>
               </a:rPr>
               <a:t>- Can we include </a:t>
             </a:r>
             <a:r>
-              <a:rPr lang="en-GB" dirty="0" err="1">
+              <a:rPr lang="en-GB" sz="600" dirty="0" err="1">
                 <a:effectLst/>
                 <a:latin typeface="Helvetica Neue" panose="02000503000000020004" pitchFamily="2" charset="0"/>
               </a:rPr>
               <a:t>cPRA</a:t>
             </a:r>
             <a:r>
-              <a:rPr lang="en-GB" dirty="0">
+              <a:rPr lang="en-GB" sz="600" dirty="0">
                 <a:effectLst/>
                 <a:latin typeface="Helvetica Neue" panose="02000503000000020004" pitchFamily="2" charset="0"/>
               </a:rPr>
@@ -8470,35 +8460,35 @@
               <a:buNone/>
             </a:pPr>
             <a:r>
-              <a:rPr lang="en-GB" dirty="0">
+              <a:rPr lang="en-GB" sz="600" dirty="0">
                 <a:effectLst/>
                 <a:latin typeface="Helvetica Neue" panose="02000503000000020004" pitchFamily="2" charset="0"/>
               </a:rPr>
               <a:t>- Some batch thing from </a:t>
             </a:r>
             <a:r>
-              <a:rPr lang="en-GB" dirty="0" err="1">
+              <a:rPr lang="en-GB" sz="600" dirty="0" err="1">
                 <a:effectLst/>
                 <a:latin typeface="Helvetica Neue" panose="02000503000000020004" pitchFamily="2" charset="0"/>
               </a:rPr>
               <a:t>CareDx</a:t>
             </a:r>
             <a:r>
-              <a:rPr lang="en-GB" dirty="0">
+              <a:rPr lang="en-GB" sz="600" dirty="0">
                 <a:effectLst/>
                 <a:latin typeface="Helvetica Neue" panose="02000503000000020004" pitchFamily="2" charset="0"/>
               </a:rPr>
               <a:t> into </a:t>
             </a:r>
             <a:r>
-              <a:rPr lang="en-GB" dirty="0" err="1">
+              <a:rPr lang="en-GB" sz="600" dirty="0" err="1">
                 <a:effectLst/>
                 <a:latin typeface="Helvetica Neue" panose="02000503000000020004" pitchFamily="2" charset="0"/>
               </a:rPr>
               <a:t>matilda</a:t>
             </a:r>
             <a:r>
-              <a:rPr lang="en-GB" dirty="0">
+              <a:rPr lang="en-GB" sz="600" dirty="0">
                 <a:effectLst/>
                 <a:latin typeface="Helvetica Neue" panose="02000503000000020004" pitchFamily="2" charset="0"/>
               </a:rPr>
@@ -8510,12 +8500,12 @@
               <a:buNone/>
             </a:pPr>
             <a:br>
-              <a:rPr lang="en-GB" dirty="0">
+              <a:rPr lang="en-GB" sz="600" dirty="0">
                 <a:effectLst/>
                 <a:latin typeface="Helvetica Neue" panose="02000503000000020004" pitchFamily="2" charset="0"/>
               </a:rPr>
             </a:br>
-            <a:endParaRPr lang="en-GB" dirty="0">
+            <a:endParaRPr lang="en-GB" sz="600" dirty="0">
               <a:effectLst/>
               <a:latin typeface="Helvetica Neue" panose="02000503000000020004" pitchFamily="2" charset="0"/>
             </a:endParaRPr>
@@ -8525,12 +8515,12 @@
               <a:buNone/>
             </a:pPr>
             <a:r>
-              <a:rPr lang="en-GB" dirty="0">
+              <a:rPr lang="en-GB" sz="600" dirty="0">
                 <a:latin typeface="Helvetica Neue" panose="02000503000000020004" pitchFamily="2" charset="0"/>
               </a:rPr>
               <a:t>Loren:</a:t>
             </a:r>
-            <a:endParaRPr lang="en-GB" dirty="0">
+            <a:endParaRPr lang="en-GB" sz="600" dirty="0">
               <a:effectLst/>
               <a:latin typeface="Helvetica Neue" panose="02000503000000020004" pitchFamily="2" charset="0"/>
             </a:endParaRPr>
@@ -8540,7 +8530,7 @@
               <a:buNone/>
             </a:pPr>
             <a:r>
-              <a:rPr lang="en-GB" dirty="0">
+              <a:rPr lang="en-GB" sz="600" dirty="0">
                 <a:effectLst/>
                 <a:latin typeface="Helvetica Neue" panose="02000503000000020004" pitchFamily="2" charset="0"/>
               </a:rPr>
@@ -8552,7 +8542,7 @@
               <a:buNone/>
             </a:pPr>
             <a:r>
-              <a:rPr lang="en-GB" dirty="0">
+              <a:rPr lang="en-GB" sz="600" dirty="0">
                 <a:effectLst/>
                 <a:latin typeface="Helvetica Neue" panose="02000503000000020004" pitchFamily="2" charset="0"/>
               </a:rPr>
@@ -8564,27 +8554,27 @@
               <a:buNone/>
             </a:pPr>
             <a:br>
-              <a:rPr lang="en-GB" dirty="0">
+              <a:rPr lang="en-GB" sz="600" dirty="0">
                 <a:effectLst/>
                 <a:latin typeface="Helvetica Neue" panose="02000503000000020004" pitchFamily="2" charset="0"/>
               </a:rPr>
             </a:br>
             <a:r>
-              <a:rPr lang="en-GB" dirty="0">
+              <a:rPr lang="en-GB" sz="600" dirty="0">
                 <a:effectLst/>
                 <a:latin typeface="Helvetica Neue" panose="02000503000000020004" pitchFamily="2" charset="0"/>
               </a:rPr>
               <a:t>Update HAML Converter? Yes but that will affect reporting on the 18</a:t>
             </a:r>
             <a:r>
-              <a:rPr lang="en-GB" baseline="30000" dirty="0">
+              <a:rPr lang="en-GB" sz="600" baseline="30000" dirty="0">
                 <a:effectLst/>
                 <a:latin typeface="Helvetica Neue" panose="02000503000000020004" pitchFamily="2" charset="0"/>
               </a:rPr>
               <a:t>th</a:t>
             </a:r>
             <a:r>
-              <a:rPr lang="en-GB" dirty="0">
+              <a:rPr lang="en-GB" sz="600" dirty="0">
                 <a:effectLst/>
                 <a:latin typeface="Helvetica Neue" panose="02000503000000020004" pitchFamily="2" charset="0"/>
               </a:rPr>
@@ -8596,7 +8586,7 @@
               <a:buNone/>
             </a:pPr>
             <a:r>
-              <a:rPr lang="en-GB" dirty="0">
+              <a:rPr lang="en-GB" sz="600" dirty="0">
                 <a:latin typeface="Helvetica Neue" panose="02000503000000020004" pitchFamily="2" charset="0"/>
               </a:rPr>
               <a:t>        Maybe William and Livia  and Ben are interested in the HAML converter tool</a:t>
@@ -8607,31 +8597,31 @@
               <a:buNone/>
             </a:pPr>
             <a:r>
-              <a:rPr lang="en-GB" dirty="0">
+              <a:rPr lang="en-GB" sz="600" dirty="0">
                 <a:latin typeface="Helvetica Neue" panose="02000503000000020004" pitchFamily="2" charset="0"/>
               </a:rPr>
               <a:t>        William and Livia demonstrated a good first pass of the modified converter. When it seems to consistently create schema-compliant </a:t>
             </a:r>
             <a:r>
-              <a:rPr lang="en-GB" dirty="0" err="1">
+              <a:rPr lang="en-GB" sz="600" dirty="0" err="1">
                 <a:latin typeface="Helvetica Neue" panose="02000503000000020004" pitchFamily="2" charset="0"/>
               </a:rPr>
               <a:t>hamls</a:t>
             </a:r>
             <a:r>
-              <a:rPr lang="en-GB" dirty="0">
+              <a:rPr lang="en-GB" sz="600" dirty="0">
                 <a:latin typeface="Helvetica Neue" panose="02000503000000020004" pitchFamily="2" charset="0"/>
               </a:rPr>
               <a:t> for both vendors, we can try updating the lambda functions for the 18</a:t>
             </a:r>
             <a:r>
-              <a:rPr lang="en-GB" baseline="30000" dirty="0">
+              <a:rPr lang="en-GB" sz="600" baseline="30000" dirty="0">
                 <a:latin typeface="Helvetica Neue" panose="02000503000000020004" pitchFamily="2" charset="0"/>
               </a:rPr>
               <a:t>th</a:t>
             </a:r>
             <a:r>
-              <a:rPr lang="en-GB" dirty="0">
+              <a:rPr lang="en-GB" sz="600" dirty="0">
                 <a:latin typeface="Helvetica Neue" panose="02000503000000020004" pitchFamily="2" charset="0"/>
               </a:rPr>
               <a:t> database.</a:t>
@@ -8641,7 +8631,7 @@
             <a:pPr marL="114300" indent="0">
               <a:buNone/>
             </a:pPr>
-            <a:endParaRPr lang="en-GB" dirty="0">
+            <a:endParaRPr lang="en-GB" sz="600" dirty="0">
               <a:effectLst/>
               <a:latin typeface="Helvetica Neue" panose="02000503000000020004" pitchFamily="2" charset="0"/>
             </a:endParaRPr>
@@ -8651,7 +8641,7 @@
               <a:buNone/>
             </a:pPr>
             <a:r>
-              <a:rPr lang="en-GB" dirty="0">
+              <a:rPr lang="en-GB" sz="600" dirty="0">
                 <a:effectLst/>
                 <a:latin typeface="Helvetica Neue" panose="02000503000000020004" pitchFamily="2" charset="0"/>
               </a:rPr>
@@ -8663,35 +8653,35 @@
               <a:buNone/>
             </a:pPr>
             <a:r>
-              <a:rPr lang="en-GB" dirty="0">
+              <a:rPr lang="en-GB" sz="600" dirty="0">
                 <a:effectLst/>
                 <a:latin typeface="Helvetica Neue" panose="02000503000000020004" pitchFamily="2" charset="0"/>
               </a:rPr>
               <a:t>I have a comment regarding version 0.4.3: I think </a:t>
             </a:r>
             <a:r>
-              <a:rPr lang="en-GB" dirty="0" err="1">
+              <a:rPr lang="en-GB" sz="600" dirty="0" err="1">
                 <a:effectLst/>
                 <a:latin typeface="Helvetica Neue" panose="02000503000000020004" pitchFamily="2" charset="0"/>
               </a:rPr>
               <a:t>plstrings</a:t>
             </a:r>
             <a:r>
-              <a:rPr lang="en-GB" dirty="0">
+              <a:rPr lang="en-GB" sz="600" dirty="0">
                 <a:effectLst/>
                 <a:latin typeface="Helvetica Neue" panose="02000503000000020004" pitchFamily="2" charset="0"/>
               </a:rPr>
               <a:t> should be capped at 1 per specificity (positive, </a:t>
             </a:r>
             <a:r>
-              <a:rPr lang="en-GB" dirty="0" err="1">
+              <a:rPr lang="en-GB" sz="600" dirty="0" err="1">
                 <a:effectLst/>
                 <a:latin typeface="Helvetica Neue" panose="02000503000000020004" pitchFamily="2" charset="0"/>
               </a:rPr>
               <a:t>questionnable</a:t>
             </a:r>
             <a:r>
-              <a:rPr lang="en-GB" dirty="0">
+              <a:rPr lang="en-GB" sz="600" dirty="0">
                 <a:effectLst/>
                 <a:latin typeface="Helvetica Neue" panose="02000503000000020004" pitchFamily="2" charset="0"/>
               </a:rPr>
@@ -8702,7 +8692,7 @@
             <a:pPr marL="114300" indent="0">
               <a:buNone/>
             </a:pPr>
-            <a:endParaRPr lang="en-GB" dirty="0">
+            <a:endParaRPr lang="en-GB" sz="600" dirty="0">
               <a:effectLst/>
               <a:latin typeface="Helvetica Neue" panose="02000503000000020004" pitchFamily="2" charset="0"/>
             </a:endParaRPr>
@@ -8711,20 +8701,19 @@
             <a:pPr marL="114300" indent="0">
               <a:buNone/>
             </a:pPr>
-            <a:br>
-              <a:rPr lang="en-GB" dirty="0">
-                <a:effectLst/>
+            <a:r>
+              <a:rPr lang="en-GB" sz="600" dirty="0">
                 <a:latin typeface="Helvetica Neue" panose="02000503000000020004" pitchFamily="2" charset="0"/>
               </a:rPr>
-            </a:br>
-            <a:r>
-              <a:rPr lang="en-GB" dirty="0" err="1">
-                <a:effectLst/>
+              <a:t>Important: Document incremental changes from 0.4.3 to 0.4.4 etc, maybe a sort </a:t>
+            </a:r>
+            <a:r>
+              <a:rPr lang="en-GB" sz="600">
                 <a:latin typeface="Helvetica Neue" panose="02000503000000020004" pitchFamily="2" charset="0"/>
               </a:rPr>
-              <a:t>ben.matern</a:t>
-            </a:r>
-            <a:endParaRPr lang="en-GB" dirty="0">
+              <a:t>of “patch notes”</a:t>
+            </a:r>
+            <a:endParaRPr lang="en-GB" sz="600" dirty="0">
               <a:effectLst/>
               <a:latin typeface="Helvetica Neue" panose="02000503000000020004" pitchFamily="2" charset="0"/>
             </a:endParaRPr>
@@ -8733,81 +8722,20 @@
             <a:pPr marL="114300" indent="0">
               <a:buNone/>
             </a:pPr>
-            <a:r>
-              <a:rPr lang="en-GB" dirty="0">
+            <a:br>
+              <a:rPr lang="en-GB" sz="600" dirty="0">
                 <a:effectLst/>
                 <a:latin typeface="Helvetica Neue" panose="02000503000000020004" pitchFamily="2" charset="0"/>
               </a:rPr>
-              <a:t>I think that can work; as long as it's acceptable to have multiple nomenclatures in a single </a:t>
-            </a:r>
-            <a:r>
-              <a:rPr lang="en-GB" dirty="0" err="1">
+            </a:br>
+            <a:r>
+              <a:rPr lang="en-GB" sz="600" dirty="0" err="1">
                 <a:effectLst/>
                 <a:latin typeface="Helvetica Neue" panose="02000503000000020004" pitchFamily="2" charset="0"/>
               </a:rPr>
-              <a:t>PLString</a:t>
-            </a:r>
-            <a:r>
-              <a:rPr lang="en-GB" dirty="0">
-                <a:effectLst/>
-                <a:latin typeface="Helvetica Neue" panose="02000503000000020004" pitchFamily="2" charset="0"/>
-              </a:rPr>
-              <a:t>,</a:t>
-            </a:r>
-          </a:p>
-          <a:p>
-            <a:pPr marL="114300" indent="0">
-              <a:buNone/>
-            </a:pPr>
-            <a:r>
-              <a:rPr lang="en-GB" dirty="0">
-                <a:effectLst/>
-                <a:latin typeface="Helvetica Neue" panose="02000503000000020004" pitchFamily="2" charset="0"/>
-              </a:rPr>
-              <a:t>Maybe someone wants to specify specific alleles as "positive", and might also specify an antigen at the same time</a:t>
-            </a:r>
-            <a:br>
-              <a:rPr lang="en-GB" dirty="0">
-                <a:effectLst/>
-                <a:latin typeface="Helvetica Neue" panose="02000503000000020004" pitchFamily="2" charset="0"/>
-              </a:rPr>
-            </a:br>
-            <a:br>
-              <a:rPr lang="en-GB" dirty="0">
-                <a:effectLst/>
-                <a:latin typeface="Helvetica Neue" panose="02000503000000020004" pitchFamily="2" charset="0"/>
-              </a:rPr>
-            </a:br>
-            <a:r>
-              <a:rPr lang="en-GB" dirty="0">
-                <a:effectLst/>
-                <a:latin typeface="Helvetica Neue" panose="02000503000000020004" pitchFamily="2" charset="0"/>
-              </a:rPr>
-              <a:t>Question: </a:t>
-            </a:r>
-          </a:p>
-          <a:p>
-            <a:pPr marL="114300" indent="0">
-              <a:buNone/>
-            </a:pPr>
-            <a:r>
-              <a:rPr lang="en-GB" dirty="0">
-                <a:latin typeface="Helvetica Neue" panose="02000503000000020004" pitchFamily="2" charset="0"/>
-              </a:rPr>
-              <a:t>         The number system 1,2,4,8, positive or negative or weak, </a:t>
-            </a:r>
-          </a:p>
-          <a:p>
-            <a:pPr marL="114300" indent="0">
-              <a:buNone/>
-            </a:pPr>
-            <a:r>
-              <a:rPr lang="en-GB" dirty="0">
-                <a:latin typeface="Helvetica Neue" panose="02000503000000020004" pitchFamily="2" charset="0"/>
-              </a:rPr>
-              <a:t>       Keep both fields and both are optional	</a:t>
-            </a:r>
-            <a:endParaRPr lang="en-GB" dirty="0">
+              <a:t>ben.matern</a:t>
+            </a:r>
+            <a:endParaRPr lang="en-GB" sz="600" dirty="0">
               <a:effectLst/>
               <a:latin typeface="Helvetica Neue" panose="02000503000000020004" pitchFamily="2" charset="0"/>
             </a:endParaRPr>
@@ -8816,7 +8744,110 @@
             <a:pPr marL="114300" indent="0">
               <a:buNone/>
             </a:pPr>
-            <a:endParaRPr lang="en-NL" dirty="0"/>
+            <a:r>
+              <a:rPr lang="en-GB" sz="600" dirty="0">
+                <a:effectLst/>
+                <a:latin typeface="Helvetica Neue" panose="02000503000000020004" pitchFamily="2" charset="0"/>
+              </a:rPr>
+              <a:t>I think that can work; as long as it's acceptable to have multiple nomenclatures in a single </a:t>
+            </a:r>
+            <a:r>
+              <a:rPr lang="en-GB" sz="600" dirty="0" err="1">
+                <a:effectLst/>
+                <a:latin typeface="Helvetica Neue" panose="02000503000000020004" pitchFamily="2" charset="0"/>
+              </a:rPr>
+              <a:t>PLString</a:t>
+            </a:r>
+            <a:r>
+              <a:rPr lang="en-GB" sz="600" dirty="0">
+                <a:effectLst/>
+                <a:latin typeface="Helvetica Neue" panose="02000503000000020004" pitchFamily="2" charset="0"/>
+              </a:rPr>
+              <a:t>,</a:t>
+            </a:r>
+          </a:p>
+          <a:p>
+            <a:pPr marL="114300" indent="0">
+              <a:buNone/>
+            </a:pPr>
+            <a:r>
+              <a:rPr lang="en-GB" sz="600" dirty="0">
+                <a:effectLst/>
+                <a:latin typeface="Helvetica Neue" panose="02000503000000020004" pitchFamily="2" charset="0"/>
+              </a:rPr>
+              <a:t>Maybe someone wants to specify specific alleles as "positive", and might also specify an antigen at the same time</a:t>
+            </a:r>
+            <a:br>
+              <a:rPr lang="en-GB" sz="600" dirty="0">
+                <a:effectLst/>
+                <a:latin typeface="Helvetica Neue" panose="02000503000000020004" pitchFamily="2" charset="0"/>
+              </a:rPr>
+            </a:br>
+            <a:br>
+              <a:rPr lang="en-GB" sz="600" dirty="0">
+                <a:effectLst/>
+                <a:latin typeface="Helvetica Neue" panose="02000503000000020004" pitchFamily="2" charset="0"/>
+              </a:rPr>
+            </a:br>
+            <a:r>
+              <a:rPr lang="en-GB" sz="600" dirty="0">
+                <a:effectLst/>
+                <a:latin typeface="Helvetica Neue" panose="02000503000000020004" pitchFamily="2" charset="0"/>
+              </a:rPr>
+              <a:t>Question: </a:t>
+            </a:r>
+          </a:p>
+          <a:p>
+            <a:pPr marL="114300" indent="0">
+              <a:buNone/>
+            </a:pPr>
+            <a:r>
+              <a:rPr lang="en-GB" sz="600" dirty="0">
+                <a:latin typeface="Helvetica Neue" panose="02000503000000020004" pitchFamily="2" charset="0"/>
+              </a:rPr>
+              <a:t>         The number system 1,2,4,8, positive or negative or weak, </a:t>
+            </a:r>
+          </a:p>
+          <a:p>
+            <a:pPr marL="114300" indent="0">
+              <a:buNone/>
+            </a:pPr>
+            <a:r>
+              <a:rPr lang="en-GB" sz="600" dirty="0">
+                <a:latin typeface="Helvetica Neue" panose="02000503000000020004" pitchFamily="2" charset="0"/>
+              </a:rPr>
+              <a:t>       Keep both fields and both are optional	</a:t>
+            </a:r>
+          </a:p>
+          <a:p>
+            <a:pPr marL="114300" indent="0">
+              <a:buNone/>
+            </a:pPr>
+            <a:endParaRPr lang="en-GB" sz="600" dirty="0">
+              <a:effectLst/>
+              <a:latin typeface="Helvetica Neue" panose="02000503000000020004" pitchFamily="2" charset="0"/>
+            </a:endParaRPr>
+          </a:p>
+          <a:p>
+            <a:pPr marL="114300" indent="0">
+              <a:buNone/>
+            </a:pPr>
+            <a:r>
+              <a:rPr lang="en-GB" sz="600" dirty="0">
+                <a:latin typeface="Helvetica Neue" panose="02000503000000020004" pitchFamily="2" charset="0"/>
+              </a:rPr>
+              <a:t>TODO: Think about where it’s appropriate to store the HAML spec repository. Should that be in NMDP Bioinformatics?</a:t>
+            </a:r>
+            <a:endParaRPr lang="en-GB" sz="600" dirty="0">
+              <a:effectLst/>
+              <a:latin typeface="Helvetica Neue" panose="02000503000000020004" pitchFamily="2" charset="0"/>
+            </a:endParaRPr>
+          </a:p>
+          <a:p>
+            <a:pPr marL="114300" indent="0">
+              <a:buNone/>
+            </a:pPr>
+            <a:endParaRPr lang="en-NL" sz="600" dirty="0"/>
           </a:p>
         </p:txBody>
       </p:sp>
